--- a/ppt/IoTAI30-NPU.pptx
+++ b/ppt/IoTAI30-NPU.pptx
@@ -5,10 +5,10 @@
     <p:sldMasterId id="2147483653" r:id="rId1"/>
   </p:sldMasterIdLst>
   <p:notesMasterIdLst>
-    <p:notesMasterId r:id="rId12"/>
+    <p:notesMasterId r:id="rId16"/>
   </p:notesMasterIdLst>
   <p:handoutMasterIdLst>
-    <p:handoutMasterId r:id="rId13"/>
+    <p:handoutMasterId r:id="rId17"/>
   </p:handoutMasterIdLst>
   <p:sldIdLst>
     <p:sldId id="264" r:id="rId2"/>
@@ -17,10 +17,14 @@
     <p:sldId id="267" r:id="rId5"/>
     <p:sldId id="268" r:id="rId6"/>
     <p:sldId id="269" r:id="rId7"/>
-    <p:sldId id="270" r:id="rId8"/>
-    <p:sldId id="271" r:id="rId9"/>
-    <p:sldId id="272" r:id="rId10"/>
-    <p:sldId id="273" r:id="rId11"/>
+    <p:sldId id="274" r:id="rId8"/>
+    <p:sldId id="275" r:id="rId9"/>
+    <p:sldId id="276" r:id="rId10"/>
+    <p:sldId id="277" r:id="rId11"/>
+    <p:sldId id="270" r:id="rId12"/>
+    <p:sldId id="271" r:id="rId13"/>
+    <p:sldId id="272" r:id="rId14"/>
+    <p:sldId id="273" r:id="rId15"/>
   </p:sldIdLst>
   <p:sldSz cx="9144000" cy="6858000" type="screen4x3"/>
   <p:notesSz cx="6648450" cy="9782175"/>
@@ -3778,7 +3782,7 @@
           <p:cNvPr id="2" name="Titre 1">
             <a:extLst>
               <a:ext uri="{FF2B5EF4-FFF2-40B4-BE49-F238E27FC236}">
-                <a16:creationId xmlns:a16="http://schemas.microsoft.com/office/drawing/2014/main" id="{9E660483-8C5D-42C9-1B82-7C2B214EBA36}"/>
+                <a16:creationId xmlns:a16="http://schemas.microsoft.com/office/drawing/2014/main" id="{84A15C67-4E69-BDB8-4979-EE69ED2FD1E5}"/>
               </a:ext>
             </a:extLst>
           </p:cNvPr>
@@ -3796,7 +3800,7 @@
           <a:p>
             <a:r>
               <a:rPr lang="fr-FR" dirty="0"/>
-              <a:t>TP 30</a:t>
+              <a:t>DPU Embarqué</a:t>
             </a:r>
           </a:p>
         </p:txBody>
@@ -3806,7 +3810,7 @@
           <p:cNvPr id="3" name="Espace réservé du contenu 2">
             <a:extLst>
               <a:ext uri="{FF2B5EF4-FFF2-40B4-BE49-F238E27FC236}">
-                <a16:creationId xmlns:a16="http://schemas.microsoft.com/office/drawing/2014/main" id="{0EDDE831-73C8-84FE-46C2-E26F560A2006}"/>
+                <a16:creationId xmlns:a16="http://schemas.microsoft.com/office/drawing/2014/main" id="{9C4A7E0B-F9A8-0836-F01C-FDB9D03ADFED}"/>
               </a:ext>
             </a:extLst>
           </p:cNvPr>
@@ -3823,16 +3827,46 @@
           <a:lstStyle/>
           <a:p>
             <a:r>
+              <a:rPr lang="fr-FR" dirty="0"/>
+              <a:t>En embarqué un DPU peut être utilisé sans GPU ni NPU</a:t>
+            </a:r>
+          </a:p>
+          <a:p>
+            <a:pPr lvl="1"/>
+            <a:r>
+              <a:rPr lang="fr-FR" dirty="0"/>
+              <a:t>Le DPU sert alors de NPU</a:t>
+            </a:r>
+          </a:p>
+          <a:p>
+            <a:pPr lvl="1"/>
+            <a:r>
+              <a:rPr lang="fr-FR" dirty="0"/>
+              <a:t>Certains fabricants mélangent les NPU et DPU</a:t>
+            </a:r>
+          </a:p>
+          <a:p>
+            <a:pPr lvl="1"/>
+            <a:r>
+              <a:rPr lang="fr-FR" dirty="0"/>
+              <a:t>Voir </a:t>
+            </a:r>
+            <a:r>
               <a:rPr lang="fr-FR"/>
-              <a:t>QEMU NPX</a:t>
-            </a:r>
+              <a:t>chapitre suivant</a:t>
+            </a:r>
+            <a:endParaRPr lang="fr-FR" dirty="0"/>
+          </a:p>
+          <a:p>
+            <a:pPr lvl="1"/>
+            <a:endParaRPr lang="fr-FR" dirty="0"/>
           </a:p>
         </p:txBody>
       </p:sp>
     </p:spTree>
     <p:extLst>
       <p:ext uri="{BB962C8B-B14F-4D97-AF65-F5344CB8AC3E}">
-        <p14:creationId xmlns:p14="http://schemas.microsoft.com/office/powerpoint/2010/main" val="3082876411"/>
+        <p14:creationId xmlns:p14="http://schemas.microsoft.com/office/powerpoint/2010/main" val="2090868272"/>
       </p:ext>
     </p:extLst>
   </p:cSld>
@@ -3842,732 +3876,7 @@
 </p:sld>
 </file>
 
-<file path=ppt/slides/slide2.xml><?xml version="1.0" encoding="utf-8"?>
-<p:sld xmlns:a="http://schemas.openxmlformats.org/drawingml/2006/main" xmlns:r="http://schemas.openxmlformats.org/officeDocument/2006/relationships" xmlns:p="http://schemas.openxmlformats.org/presentationml/2006/main">
-  <p:cSld>
-    <p:spTree>
-      <p:nvGrpSpPr>
-        <p:cNvPr id="1" name=""/>
-        <p:cNvGrpSpPr/>
-        <p:nvPr/>
-      </p:nvGrpSpPr>
-      <p:grpSpPr>
-        <a:xfrm>
-          <a:off x="0" y="0"/>
-          <a:ext cx="0" cy="0"/>
-          <a:chOff x="0" y="0"/>
-          <a:chExt cx="0" cy="0"/>
-        </a:xfrm>
-      </p:grpSpPr>
-      <p:sp>
-        <p:nvSpPr>
-          <p:cNvPr id="2" name="Titre 1">
-            <a:extLst>
-              <a:ext uri="{FF2B5EF4-FFF2-40B4-BE49-F238E27FC236}">
-                <a16:creationId xmlns:a16="http://schemas.microsoft.com/office/drawing/2014/main" id="{F13A1D30-3532-BD18-D58E-1FFF865E8CF1}"/>
-              </a:ext>
-            </a:extLst>
-          </p:cNvPr>
-          <p:cNvSpPr>
-            <a:spLocks noGrp="1"/>
-          </p:cNvSpPr>
-          <p:nvPr>
-            <p:ph type="title"/>
-          </p:nvPr>
-        </p:nvSpPr>
-        <p:spPr/>
-        <p:txBody>
-          <a:bodyPr/>
-          <a:lstStyle/>
-          <a:p>
-            <a:r>
-              <a:rPr lang="fr-FR" dirty="0"/>
-              <a:t>Multi-</a:t>
-            </a:r>
-            <a:r>
-              <a:rPr lang="fr-FR" dirty="0" err="1"/>
-              <a:t>core</a:t>
-            </a:r>
-            <a:endParaRPr lang="fr-FR" dirty="0"/>
-          </a:p>
-        </p:txBody>
-      </p:sp>
-      <p:sp>
-        <p:nvSpPr>
-          <p:cNvPr id="3" name="Espace réservé du contenu 2">
-            <a:extLst>
-              <a:ext uri="{FF2B5EF4-FFF2-40B4-BE49-F238E27FC236}">
-                <a16:creationId xmlns:a16="http://schemas.microsoft.com/office/drawing/2014/main" id="{C7B020B0-1864-6882-55C3-CD36FA0778DA}"/>
-              </a:ext>
-            </a:extLst>
-          </p:cNvPr>
-          <p:cNvSpPr>
-            <a:spLocks noGrp="1"/>
-          </p:cNvSpPr>
-          <p:nvPr>
-            <p:ph idx="1"/>
-          </p:nvPr>
-        </p:nvSpPr>
-        <p:spPr/>
-        <p:txBody>
-          <a:bodyPr/>
-          <a:lstStyle/>
-          <a:p>
-            <a:r>
-              <a:rPr lang="fr-FR" dirty="0"/>
-              <a:t>Nativement </a:t>
-            </a:r>
-            <a:r>
-              <a:rPr lang="fr-FR" dirty="0" err="1"/>
-              <a:t>ExecuTorch</a:t>
-            </a:r>
-            <a:r>
-              <a:rPr lang="fr-FR" dirty="0"/>
-              <a:t> est multi-</a:t>
-            </a:r>
-            <a:r>
-              <a:rPr lang="fr-FR" dirty="0" err="1"/>
-              <a:t>core</a:t>
-            </a:r>
-            <a:r>
-              <a:rPr lang="fr-FR" dirty="0"/>
-              <a:t> et GPU</a:t>
-            </a:r>
-          </a:p>
-          <a:p>
-            <a:r>
-              <a:rPr lang="fr-FR" dirty="0"/>
-              <a:t>Mais les plateformes </a:t>
-            </a:r>
-            <a:r>
-              <a:rPr lang="fr-FR" dirty="0" err="1"/>
-              <a:t>ExecuTorch</a:t>
-            </a:r>
-            <a:r>
-              <a:rPr lang="fr-FR" dirty="0"/>
-              <a:t> peuvent être compatibles NPU et DSP</a:t>
-            </a:r>
-          </a:p>
-        </p:txBody>
-      </p:sp>
-    </p:spTree>
-    <p:extLst>
-      <p:ext uri="{BB962C8B-B14F-4D97-AF65-F5344CB8AC3E}">
-        <p14:creationId xmlns:p14="http://schemas.microsoft.com/office/powerpoint/2010/main" val="2388362453"/>
-      </p:ext>
-    </p:extLst>
-  </p:cSld>
-  <p:clrMapOvr>
-    <a:masterClrMapping/>
-  </p:clrMapOvr>
-</p:sld>
-</file>
-
-<file path=ppt/slides/slide3.xml><?xml version="1.0" encoding="utf-8"?>
-<p:sld xmlns:a="http://schemas.openxmlformats.org/drawingml/2006/main" xmlns:r="http://schemas.openxmlformats.org/officeDocument/2006/relationships" xmlns:p="http://schemas.openxmlformats.org/presentationml/2006/main">
-  <p:cSld>
-    <p:spTree>
-      <p:nvGrpSpPr>
-        <p:cNvPr id="1" name=""/>
-        <p:cNvGrpSpPr/>
-        <p:nvPr/>
-      </p:nvGrpSpPr>
-      <p:grpSpPr>
-        <a:xfrm>
-          <a:off x="0" y="0"/>
-          <a:ext cx="0" cy="0"/>
-          <a:chOff x="0" y="0"/>
-          <a:chExt cx="0" cy="0"/>
-        </a:xfrm>
-      </p:grpSpPr>
-      <p:sp>
-        <p:nvSpPr>
-          <p:cNvPr id="2" name="Titre 1">
-            <a:extLst>
-              <a:ext uri="{FF2B5EF4-FFF2-40B4-BE49-F238E27FC236}">
-                <a16:creationId xmlns:a16="http://schemas.microsoft.com/office/drawing/2014/main" id="{A42B199A-8DF6-D257-4F1A-DF7667B405D4}"/>
-              </a:ext>
-            </a:extLst>
-          </p:cNvPr>
-          <p:cNvSpPr>
-            <a:spLocks noGrp="1"/>
-          </p:cNvSpPr>
-          <p:nvPr>
-            <p:ph type="title"/>
-          </p:nvPr>
-        </p:nvSpPr>
-        <p:spPr/>
-        <p:txBody>
-          <a:bodyPr/>
-          <a:lstStyle/>
-          <a:p>
-            <a:r>
-              <a:rPr lang="fr-FR" dirty="0"/>
-              <a:t>NPU</a:t>
-            </a:r>
-          </a:p>
-        </p:txBody>
-      </p:sp>
-      <p:sp>
-        <p:nvSpPr>
-          <p:cNvPr id="3" name="Espace réservé du contenu 2">
-            <a:extLst>
-              <a:ext uri="{FF2B5EF4-FFF2-40B4-BE49-F238E27FC236}">
-                <a16:creationId xmlns:a16="http://schemas.microsoft.com/office/drawing/2014/main" id="{B536F32A-0857-EB4A-50C1-A16DAC7546D9}"/>
-              </a:ext>
-            </a:extLst>
-          </p:cNvPr>
-          <p:cNvSpPr>
-            <a:spLocks noGrp="1"/>
-          </p:cNvSpPr>
-          <p:nvPr>
-            <p:ph idx="1"/>
-          </p:nvPr>
-        </p:nvSpPr>
-        <p:spPr/>
-        <p:txBody>
-          <a:bodyPr/>
-          <a:lstStyle/>
-          <a:p>
-            <a:r>
-              <a:rPr lang="fr-FR" dirty="0"/>
-              <a:t>Un Neural </a:t>
-            </a:r>
-            <a:r>
-              <a:rPr lang="fr-FR" dirty="0" err="1"/>
-              <a:t>Processing</a:t>
-            </a:r>
-            <a:r>
-              <a:rPr lang="fr-FR" dirty="0"/>
-              <a:t> Unit est un microprocesseur conçu pour accélérer un réseau de neurones</a:t>
-            </a:r>
-          </a:p>
-          <a:p>
-            <a:r>
-              <a:rPr lang="fr-FR" dirty="0"/>
-              <a:t>Il s'agit souvent de conceptions multicœurs et se concentrant :</a:t>
-            </a:r>
-          </a:p>
-          <a:p>
-            <a:pPr lvl="1"/>
-            <a:r>
-              <a:rPr lang="fr-FR" dirty="0"/>
-              <a:t>Sur l'arithmétique de faible précision</a:t>
-            </a:r>
-          </a:p>
-          <a:p>
-            <a:pPr lvl="1"/>
-            <a:r>
-              <a:rPr lang="fr-FR" dirty="0"/>
-              <a:t>Des nouvelles architectures de flux de données</a:t>
-            </a:r>
-          </a:p>
-          <a:p>
-            <a:r>
-              <a:rPr lang="fr-FR" dirty="0"/>
-              <a:t>Il n'y a pas de définition précise autre que Accélérateur d'IA</a:t>
-            </a:r>
-          </a:p>
-          <a:p>
-            <a:pPr lvl="1"/>
-            <a:r>
-              <a:rPr lang="fr-FR" dirty="0"/>
-              <a:t>Il en existe plusieurs types de plusieurs marques</a:t>
-            </a:r>
-          </a:p>
-          <a:p>
-            <a:endParaRPr lang="fr-FR" dirty="0"/>
-          </a:p>
-        </p:txBody>
-      </p:sp>
-    </p:spTree>
-    <p:extLst>
-      <p:ext uri="{BB962C8B-B14F-4D97-AF65-F5344CB8AC3E}">
-        <p14:creationId xmlns:p14="http://schemas.microsoft.com/office/powerpoint/2010/main" val="3630926175"/>
-      </p:ext>
-    </p:extLst>
-  </p:cSld>
-  <p:clrMapOvr>
-    <a:masterClrMapping/>
-  </p:clrMapOvr>
-</p:sld>
-</file>
-
-<file path=ppt/slides/slide4.xml><?xml version="1.0" encoding="utf-8"?>
-<p:sld xmlns:a="http://schemas.openxmlformats.org/drawingml/2006/main" xmlns:r="http://schemas.openxmlformats.org/officeDocument/2006/relationships" xmlns:p="http://schemas.openxmlformats.org/presentationml/2006/main">
-  <p:cSld>
-    <p:spTree>
-      <p:nvGrpSpPr>
-        <p:cNvPr id="1" name=""/>
-        <p:cNvGrpSpPr/>
-        <p:nvPr/>
-      </p:nvGrpSpPr>
-      <p:grpSpPr>
-        <a:xfrm>
-          <a:off x="0" y="0"/>
-          <a:ext cx="0" cy="0"/>
-          <a:chOff x="0" y="0"/>
-          <a:chExt cx="0" cy="0"/>
-        </a:xfrm>
-      </p:grpSpPr>
-      <p:sp>
-        <p:nvSpPr>
-          <p:cNvPr id="2" name="Titre 1">
-            <a:extLst>
-              <a:ext uri="{FF2B5EF4-FFF2-40B4-BE49-F238E27FC236}">
-                <a16:creationId xmlns:a16="http://schemas.microsoft.com/office/drawing/2014/main" id="{D197C961-F347-464D-BA8C-EBC7EF78629D}"/>
-              </a:ext>
-            </a:extLst>
-          </p:cNvPr>
-          <p:cNvSpPr>
-            <a:spLocks noGrp="1"/>
-          </p:cNvSpPr>
-          <p:nvPr>
-            <p:ph type="title"/>
-          </p:nvPr>
-        </p:nvSpPr>
-        <p:spPr/>
-        <p:txBody>
-          <a:bodyPr/>
-          <a:lstStyle/>
-          <a:p>
-            <a:r>
-              <a:rPr lang="fr-FR" dirty="0"/>
-              <a:t>NPU</a:t>
-            </a:r>
-          </a:p>
-        </p:txBody>
-      </p:sp>
-      <p:sp>
-        <p:nvSpPr>
-          <p:cNvPr id="3" name="Espace réservé du contenu 2">
-            <a:extLst>
-              <a:ext uri="{FF2B5EF4-FFF2-40B4-BE49-F238E27FC236}">
-                <a16:creationId xmlns:a16="http://schemas.microsoft.com/office/drawing/2014/main" id="{8DCB3148-4E7F-EC6D-2590-49558179FA5A}"/>
-              </a:ext>
-            </a:extLst>
-          </p:cNvPr>
-          <p:cNvSpPr>
-            <a:spLocks noGrp="1"/>
-          </p:cNvSpPr>
-          <p:nvPr>
-            <p:ph idx="1"/>
-          </p:nvPr>
-        </p:nvSpPr>
-        <p:spPr/>
-        <p:txBody>
-          <a:bodyPr/>
-          <a:lstStyle/>
-          <a:p>
-            <a:r>
-              <a:rPr lang="fr-FR" dirty="0"/>
-              <a:t>Un NPU est de conception GPU</a:t>
-            </a:r>
-          </a:p>
-          <a:p>
-            <a:pPr lvl="1"/>
-            <a:r>
-              <a:rPr lang="fr-FR" dirty="0"/>
-              <a:t>Les commandes 3D ou Video2d ont été enlevées</a:t>
-            </a:r>
-          </a:p>
-          <a:p>
-            <a:r>
-              <a:rPr lang="fr-FR" dirty="0"/>
-              <a:t>Très souvent dédié aux int8 ou inférieur</a:t>
-            </a:r>
-          </a:p>
-          <a:p>
-            <a:pPr lvl="1"/>
-            <a:r>
-              <a:rPr lang="fr-FR" dirty="0"/>
-              <a:t>Des fois fp32 ou fp16</a:t>
-            </a:r>
-          </a:p>
-          <a:p>
-            <a:r>
-              <a:rPr lang="fr-FR" dirty="0"/>
-              <a:t>Orienté flux de données</a:t>
-            </a:r>
-          </a:p>
-          <a:p>
-            <a:pPr lvl="1"/>
-            <a:r>
-              <a:rPr lang="fr-FR" dirty="0"/>
-              <a:t>Les données sont en vecteur et non en matrice comme dans les </a:t>
-            </a:r>
-            <a:r>
-              <a:rPr lang="fr-FR" dirty="0" err="1"/>
-              <a:t>GPUs</a:t>
-            </a:r>
-            <a:endParaRPr lang="fr-FR" dirty="0"/>
-          </a:p>
-          <a:p>
-            <a:pPr lvl="1"/>
-            <a:r>
-              <a:rPr lang="fr-FR" dirty="0"/>
-              <a:t>L'inférence est séquentielle et vide les </a:t>
-            </a:r>
-            <a:r>
-              <a:rPr lang="fr-FR" dirty="0" err="1"/>
-              <a:t>layers</a:t>
-            </a:r>
-            <a:r>
-              <a:rPr lang="fr-FR" dirty="0"/>
-              <a:t> l-2 (l-3 si </a:t>
-            </a:r>
-            <a:r>
-              <a:rPr lang="fr-FR" dirty="0" err="1"/>
-              <a:t>ResNet</a:t>
-            </a:r>
-            <a:r>
-              <a:rPr lang="fr-FR" dirty="0"/>
-              <a:t>)</a:t>
-            </a:r>
-          </a:p>
-          <a:p>
-            <a:pPr lvl="1"/>
-            <a:r>
-              <a:rPr lang="fr-FR" dirty="0"/>
-              <a:t>Tabulation des fonctions trigo en </a:t>
-            </a:r>
-            <a:r>
-              <a:rPr lang="fr-FR" dirty="0" err="1"/>
-              <a:t>int</a:t>
-            </a:r>
-            <a:endParaRPr lang="fr-FR" dirty="0"/>
-          </a:p>
-          <a:p>
-            <a:pPr lvl="1"/>
-            <a:endParaRPr lang="fr-FR" dirty="0"/>
-          </a:p>
-          <a:p>
-            <a:endParaRPr lang="fr-FR" dirty="0"/>
-          </a:p>
-          <a:p>
-            <a:pPr lvl="1"/>
-            <a:endParaRPr lang="fr-FR" dirty="0"/>
-          </a:p>
-        </p:txBody>
-      </p:sp>
-    </p:spTree>
-    <p:extLst>
-      <p:ext uri="{BB962C8B-B14F-4D97-AF65-F5344CB8AC3E}">
-        <p14:creationId xmlns:p14="http://schemas.microsoft.com/office/powerpoint/2010/main" val="2430736519"/>
-      </p:ext>
-    </p:extLst>
-  </p:cSld>
-  <p:clrMapOvr>
-    <a:masterClrMapping/>
-  </p:clrMapOvr>
-</p:sld>
-</file>
-
-<file path=ppt/slides/slide5.xml><?xml version="1.0" encoding="utf-8"?>
-<p:sld xmlns:a="http://schemas.openxmlformats.org/drawingml/2006/main" xmlns:r="http://schemas.openxmlformats.org/officeDocument/2006/relationships" xmlns:p="http://schemas.openxmlformats.org/presentationml/2006/main">
-  <p:cSld>
-    <p:spTree>
-      <p:nvGrpSpPr>
-        <p:cNvPr id="1" name=""/>
-        <p:cNvGrpSpPr/>
-        <p:nvPr/>
-      </p:nvGrpSpPr>
-      <p:grpSpPr>
-        <a:xfrm>
-          <a:off x="0" y="0"/>
-          <a:ext cx="0" cy="0"/>
-          <a:chOff x="0" y="0"/>
-          <a:chExt cx="0" cy="0"/>
-        </a:xfrm>
-      </p:grpSpPr>
-      <p:sp>
-        <p:nvSpPr>
-          <p:cNvPr id="2" name="Titre 1">
-            <a:extLst>
-              <a:ext uri="{FF2B5EF4-FFF2-40B4-BE49-F238E27FC236}">
-                <a16:creationId xmlns:a16="http://schemas.microsoft.com/office/drawing/2014/main" id="{C79C94A9-E3AA-7FC2-C7C2-5E8ED32B2769}"/>
-              </a:ext>
-            </a:extLst>
-          </p:cNvPr>
-          <p:cNvSpPr>
-            <a:spLocks noGrp="1"/>
-          </p:cNvSpPr>
-          <p:nvPr>
-            <p:ph type="title"/>
-          </p:nvPr>
-        </p:nvSpPr>
-        <p:spPr/>
-        <p:txBody>
-          <a:bodyPr/>
-          <a:lstStyle/>
-          <a:p>
-            <a:r>
-              <a:rPr lang="fr-FR" dirty="0"/>
-              <a:t>Historique</a:t>
-            </a:r>
-          </a:p>
-        </p:txBody>
-      </p:sp>
-      <p:sp>
-        <p:nvSpPr>
-          <p:cNvPr id="3" name="Espace réservé du contenu 2">
-            <a:extLst>
-              <a:ext uri="{FF2B5EF4-FFF2-40B4-BE49-F238E27FC236}">
-                <a16:creationId xmlns:a16="http://schemas.microsoft.com/office/drawing/2014/main" id="{4D35D9D8-1398-C9DF-7B7B-130D0DC3BA07}"/>
-              </a:ext>
-            </a:extLst>
-          </p:cNvPr>
-          <p:cNvSpPr>
-            <a:spLocks noGrp="1"/>
-          </p:cNvSpPr>
-          <p:nvPr>
-            <p:ph idx="1"/>
-          </p:nvPr>
-        </p:nvSpPr>
-        <p:spPr/>
-        <p:txBody>
-          <a:bodyPr/>
-          <a:lstStyle/>
-          <a:p>
-            <a:r>
-              <a:rPr lang="fr-FR" dirty="0"/>
-              <a:t>Les tout premiers NPU étaient des CPU ou FPU</a:t>
-            </a:r>
-          </a:p>
-          <a:p>
-            <a:pPr lvl="1"/>
-            <a:r>
-              <a:rPr lang="fr-FR" dirty="0"/>
-              <a:t>16 bits Motorola 68030</a:t>
-            </a:r>
-          </a:p>
-          <a:p>
-            <a:pPr lvl="1"/>
-            <a:r>
-              <a:rPr lang="fr-FR" dirty="0"/>
-              <a:t>32 bits FPU Intel</a:t>
-            </a:r>
-          </a:p>
-          <a:p>
-            <a:r>
-              <a:rPr lang="fr-FR" dirty="0"/>
-              <a:t>Les NPU suivants étaient des DSP</a:t>
-            </a:r>
-          </a:p>
-          <a:p>
-            <a:r>
-              <a:rPr lang="fr-FR" dirty="0"/>
-              <a:t>Certains NPU sont des GPU simplifiés</a:t>
-            </a:r>
-          </a:p>
-          <a:p>
-            <a:pPr lvl="1"/>
-            <a:r>
-              <a:rPr lang="fr-FR" dirty="0" err="1"/>
-              <a:t>NVidia</a:t>
-            </a:r>
-            <a:endParaRPr lang="fr-FR" dirty="0"/>
-          </a:p>
-          <a:p>
-            <a:r>
-              <a:rPr lang="fr-FR" dirty="0"/>
-              <a:t>ASIC</a:t>
-            </a:r>
-          </a:p>
-          <a:p>
-            <a:pPr lvl="1"/>
-            <a:r>
-              <a:rPr lang="fr-FR" dirty="0"/>
-              <a:t>Un NPU est aujourd'hui un circuit intégré spécifique à une application dérivé d'un GPU</a:t>
-            </a:r>
-          </a:p>
-        </p:txBody>
-      </p:sp>
-    </p:spTree>
-    <p:extLst>
-      <p:ext uri="{BB962C8B-B14F-4D97-AF65-F5344CB8AC3E}">
-        <p14:creationId xmlns:p14="http://schemas.microsoft.com/office/powerpoint/2010/main" val="3802658879"/>
-      </p:ext>
-    </p:extLst>
-  </p:cSld>
-  <p:clrMapOvr>
-    <a:masterClrMapping/>
-  </p:clrMapOvr>
-</p:sld>
-</file>
-
-<file path=ppt/slides/slide6.xml><?xml version="1.0" encoding="utf-8"?>
-<p:sld xmlns:a="http://schemas.openxmlformats.org/drawingml/2006/main" xmlns:r="http://schemas.openxmlformats.org/officeDocument/2006/relationships" xmlns:p="http://schemas.openxmlformats.org/presentationml/2006/main">
-  <p:cSld>
-    <p:spTree>
-      <p:nvGrpSpPr>
-        <p:cNvPr id="1" name=""/>
-        <p:cNvGrpSpPr/>
-        <p:nvPr/>
-      </p:nvGrpSpPr>
-      <p:grpSpPr>
-        <a:xfrm>
-          <a:off x="0" y="0"/>
-          <a:ext cx="0" cy="0"/>
-          <a:chOff x="0" y="0"/>
-          <a:chExt cx="0" cy="0"/>
-        </a:xfrm>
-      </p:grpSpPr>
-      <p:sp>
-        <p:nvSpPr>
-          <p:cNvPr id="2" name="Titre 1">
-            <a:extLst>
-              <a:ext uri="{FF2B5EF4-FFF2-40B4-BE49-F238E27FC236}">
-                <a16:creationId xmlns:a16="http://schemas.microsoft.com/office/drawing/2014/main" id="{B3EF3129-9C8D-900A-C3C8-31B57E0ED1A8}"/>
-              </a:ext>
-            </a:extLst>
-          </p:cNvPr>
-          <p:cNvSpPr>
-            <a:spLocks noGrp="1"/>
-          </p:cNvSpPr>
-          <p:nvPr>
-            <p:ph type="title"/>
-          </p:nvPr>
-        </p:nvSpPr>
-        <p:spPr/>
-        <p:txBody>
-          <a:bodyPr/>
-          <a:lstStyle/>
-          <a:p>
-            <a:r>
-              <a:rPr lang="fr-FR" dirty="0"/>
-              <a:t>Liste des principaux NPU</a:t>
-            </a:r>
-          </a:p>
-        </p:txBody>
-      </p:sp>
-      <p:sp>
-        <p:nvSpPr>
-          <p:cNvPr id="3" name="Espace réservé du contenu 2">
-            <a:extLst>
-              <a:ext uri="{FF2B5EF4-FFF2-40B4-BE49-F238E27FC236}">
-                <a16:creationId xmlns:a16="http://schemas.microsoft.com/office/drawing/2014/main" id="{3C6D2A0B-2F59-5425-AC5B-BE2592817844}"/>
-              </a:ext>
-            </a:extLst>
-          </p:cNvPr>
-          <p:cNvSpPr>
-            <a:spLocks noGrp="1"/>
-          </p:cNvSpPr>
-          <p:nvPr>
-            <p:ph idx="1"/>
-          </p:nvPr>
-        </p:nvSpPr>
-        <p:spPr/>
-        <p:txBody>
-          <a:bodyPr/>
-          <a:lstStyle/>
-          <a:p>
-            <a:r>
-              <a:rPr lang="fr-FR" dirty="0"/>
-              <a:t>Sur PC Intel, </a:t>
-            </a:r>
-            <a:r>
-              <a:rPr lang="fr-FR" dirty="0" err="1"/>
-              <a:t>Qualcom</a:t>
-            </a:r>
-            <a:r>
-              <a:rPr lang="fr-FR" dirty="0"/>
-              <a:t> ARM et AMD intègrent des NPU natifs</a:t>
-            </a:r>
-          </a:p>
-          <a:p>
-            <a:r>
-              <a:rPr lang="fr-FR" dirty="0"/>
-              <a:t>En téléphonie Apple, Google et </a:t>
-            </a:r>
-            <a:r>
-              <a:rPr lang="fr-FR" dirty="0" err="1"/>
-              <a:t>Qualcom</a:t>
-            </a:r>
-            <a:r>
-              <a:rPr lang="fr-FR" dirty="0"/>
-              <a:t> en intègre également</a:t>
-            </a:r>
-          </a:p>
-          <a:p>
-            <a:r>
-              <a:rPr lang="fr-FR" dirty="0"/>
-              <a:t>En embarqué</a:t>
-            </a:r>
-          </a:p>
-          <a:p>
-            <a:pPr lvl="1"/>
-            <a:r>
-              <a:rPr lang="fr-FR" dirty="0"/>
-              <a:t>NXP i.MX : le plus utilisé en industrie</a:t>
-            </a:r>
-          </a:p>
-          <a:p>
-            <a:pPr lvl="1"/>
-            <a:r>
-              <a:rPr lang="fr-FR" dirty="0" err="1"/>
-              <a:t>Rockchip</a:t>
-            </a:r>
-            <a:r>
-              <a:rPr lang="fr-FR" dirty="0"/>
-              <a:t> RK3588 : IoT</a:t>
-            </a:r>
-          </a:p>
-          <a:p>
-            <a:pPr lvl="1"/>
-            <a:r>
-              <a:rPr lang="fr-FR" dirty="0"/>
-              <a:t>Hailo-8 / H8 : vision</a:t>
-            </a:r>
-          </a:p>
-          <a:p>
-            <a:pPr lvl="1"/>
-            <a:r>
-              <a:rPr lang="fr-FR" dirty="0" err="1"/>
-              <a:t>MemryX</a:t>
-            </a:r>
-            <a:endParaRPr lang="fr-FR" dirty="0"/>
-          </a:p>
-          <a:p>
-            <a:pPr lvl="1"/>
-            <a:r>
-              <a:rPr lang="fr-FR" dirty="0" err="1"/>
-              <a:t>DeepX</a:t>
-            </a:r>
-            <a:endParaRPr lang="fr-FR" dirty="0"/>
-          </a:p>
-          <a:p>
-            <a:pPr lvl="1"/>
-            <a:r>
-              <a:rPr lang="fr-FR" dirty="0" err="1"/>
-              <a:t>NVidia</a:t>
-            </a:r>
-            <a:endParaRPr lang="fr-FR" dirty="0"/>
-          </a:p>
-          <a:p>
-            <a:pPr lvl="1"/>
-            <a:endParaRPr lang="fr-FR" dirty="0"/>
-          </a:p>
-          <a:p>
-            <a:pPr lvl="1"/>
-            <a:endParaRPr lang="fr-FR" dirty="0"/>
-          </a:p>
-        </p:txBody>
-      </p:sp>
-    </p:spTree>
-    <p:extLst>
-      <p:ext uri="{BB962C8B-B14F-4D97-AF65-F5344CB8AC3E}">
-        <p14:creationId xmlns:p14="http://schemas.microsoft.com/office/powerpoint/2010/main" val="3492214614"/>
-      </p:ext>
-    </p:extLst>
-  </p:cSld>
-  <p:clrMapOvr>
-    <a:masterClrMapping/>
-  </p:clrMapOvr>
-</p:sld>
-</file>
-
-<file path=ppt/slides/slide7.xml><?xml version="1.0" encoding="utf-8"?>
+<file path=ppt/slides/slide11.xml><?xml version="1.0" encoding="utf-8"?>
 <p:sld xmlns:a="http://schemas.openxmlformats.org/drawingml/2006/main" xmlns:r="http://schemas.openxmlformats.org/officeDocument/2006/relationships" xmlns:p="http://schemas.openxmlformats.org/presentationml/2006/main">
   <p:cSld>
     <p:spTree>
@@ -4722,7 +4031,7 @@
 </p:sld>
 </file>
 
-<file path=ppt/slides/slide8.xml><?xml version="1.0" encoding="utf-8"?>
+<file path=ppt/slides/slide12.xml><?xml version="1.0" encoding="utf-8"?>
 <p:sld xmlns:a="http://schemas.openxmlformats.org/drawingml/2006/main" xmlns:r="http://schemas.openxmlformats.org/officeDocument/2006/relationships" xmlns:p="http://schemas.openxmlformats.org/presentationml/2006/main">
   <p:cSld>
     <p:spTree>
@@ -4870,7 +4179,7 @@
 </p:sld>
 </file>
 
-<file path=ppt/slides/slide9.xml><?xml version="1.0" encoding="utf-8"?>
+<file path=ppt/slides/slide13.xml><?xml version="1.0" encoding="utf-8"?>
 <p:sld xmlns:a="http://schemas.openxmlformats.org/drawingml/2006/main" xmlns:r="http://schemas.openxmlformats.org/officeDocument/2006/relationships" xmlns:p="http://schemas.openxmlformats.org/presentationml/2006/main">
   <p:cSld>
     <p:spTree>
@@ -4994,6 +4303,1190 @@
     <p:extLst>
       <p:ext uri="{BB962C8B-B14F-4D97-AF65-F5344CB8AC3E}">
         <p14:creationId xmlns:p14="http://schemas.microsoft.com/office/powerpoint/2010/main" val="2148741074"/>
+      </p:ext>
+    </p:extLst>
+  </p:cSld>
+  <p:clrMapOvr>
+    <a:masterClrMapping/>
+  </p:clrMapOvr>
+</p:sld>
+</file>
+
+<file path=ppt/slides/slide14.xml><?xml version="1.0" encoding="utf-8"?>
+<p:sld xmlns:a="http://schemas.openxmlformats.org/drawingml/2006/main" xmlns:r="http://schemas.openxmlformats.org/officeDocument/2006/relationships" xmlns:p="http://schemas.openxmlformats.org/presentationml/2006/main">
+  <p:cSld>
+    <p:spTree>
+      <p:nvGrpSpPr>
+        <p:cNvPr id="1" name=""/>
+        <p:cNvGrpSpPr/>
+        <p:nvPr/>
+      </p:nvGrpSpPr>
+      <p:grpSpPr>
+        <a:xfrm>
+          <a:off x="0" y="0"/>
+          <a:ext cx="0" cy="0"/>
+          <a:chOff x="0" y="0"/>
+          <a:chExt cx="0" cy="0"/>
+        </a:xfrm>
+      </p:grpSpPr>
+      <p:sp>
+        <p:nvSpPr>
+          <p:cNvPr id="2" name="Titre 1">
+            <a:extLst>
+              <a:ext uri="{FF2B5EF4-FFF2-40B4-BE49-F238E27FC236}">
+                <a16:creationId xmlns:a16="http://schemas.microsoft.com/office/drawing/2014/main" id="{9E660483-8C5D-42C9-1B82-7C2B214EBA36}"/>
+              </a:ext>
+            </a:extLst>
+          </p:cNvPr>
+          <p:cNvSpPr>
+            <a:spLocks noGrp="1"/>
+          </p:cNvSpPr>
+          <p:nvPr>
+            <p:ph type="title"/>
+          </p:nvPr>
+        </p:nvSpPr>
+        <p:spPr/>
+        <p:txBody>
+          <a:bodyPr/>
+          <a:lstStyle/>
+          <a:p>
+            <a:r>
+              <a:rPr lang="fr-FR" dirty="0"/>
+              <a:t>TP 30</a:t>
+            </a:r>
+          </a:p>
+        </p:txBody>
+      </p:sp>
+      <p:sp>
+        <p:nvSpPr>
+          <p:cNvPr id="3" name="Espace réservé du contenu 2">
+            <a:extLst>
+              <a:ext uri="{FF2B5EF4-FFF2-40B4-BE49-F238E27FC236}">
+                <a16:creationId xmlns:a16="http://schemas.microsoft.com/office/drawing/2014/main" id="{0EDDE831-73C8-84FE-46C2-E26F560A2006}"/>
+              </a:ext>
+            </a:extLst>
+          </p:cNvPr>
+          <p:cNvSpPr>
+            <a:spLocks noGrp="1"/>
+          </p:cNvSpPr>
+          <p:nvPr>
+            <p:ph idx="1"/>
+          </p:nvPr>
+        </p:nvSpPr>
+        <p:spPr/>
+        <p:txBody>
+          <a:bodyPr/>
+          <a:lstStyle/>
+          <a:p>
+            <a:r>
+              <a:rPr lang="fr-FR"/>
+              <a:t>QEMU NPX</a:t>
+            </a:r>
+          </a:p>
+        </p:txBody>
+      </p:sp>
+    </p:spTree>
+    <p:extLst>
+      <p:ext uri="{BB962C8B-B14F-4D97-AF65-F5344CB8AC3E}">
+        <p14:creationId xmlns:p14="http://schemas.microsoft.com/office/powerpoint/2010/main" val="3082876411"/>
+      </p:ext>
+    </p:extLst>
+  </p:cSld>
+  <p:clrMapOvr>
+    <a:masterClrMapping/>
+  </p:clrMapOvr>
+</p:sld>
+</file>
+
+<file path=ppt/slides/slide2.xml><?xml version="1.0" encoding="utf-8"?>
+<p:sld xmlns:a="http://schemas.openxmlformats.org/drawingml/2006/main" xmlns:r="http://schemas.openxmlformats.org/officeDocument/2006/relationships" xmlns:p="http://schemas.openxmlformats.org/presentationml/2006/main">
+  <p:cSld>
+    <p:spTree>
+      <p:nvGrpSpPr>
+        <p:cNvPr id="1" name=""/>
+        <p:cNvGrpSpPr/>
+        <p:nvPr/>
+      </p:nvGrpSpPr>
+      <p:grpSpPr>
+        <a:xfrm>
+          <a:off x="0" y="0"/>
+          <a:ext cx="0" cy="0"/>
+          <a:chOff x="0" y="0"/>
+          <a:chExt cx="0" cy="0"/>
+        </a:xfrm>
+      </p:grpSpPr>
+      <p:sp>
+        <p:nvSpPr>
+          <p:cNvPr id="2" name="Titre 1">
+            <a:extLst>
+              <a:ext uri="{FF2B5EF4-FFF2-40B4-BE49-F238E27FC236}">
+                <a16:creationId xmlns:a16="http://schemas.microsoft.com/office/drawing/2014/main" id="{F13A1D30-3532-BD18-D58E-1FFF865E8CF1}"/>
+              </a:ext>
+            </a:extLst>
+          </p:cNvPr>
+          <p:cNvSpPr>
+            <a:spLocks noGrp="1"/>
+          </p:cNvSpPr>
+          <p:nvPr>
+            <p:ph type="title"/>
+          </p:nvPr>
+        </p:nvSpPr>
+        <p:spPr/>
+        <p:txBody>
+          <a:bodyPr/>
+          <a:lstStyle/>
+          <a:p>
+            <a:r>
+              <a:rPr lang="fr-FR" dirty="0"/>
+              <a:t>Multi-</a:t>
+            </a:r>
+            <a:r>
+              <a:rPr lang="fr-FR" dirty="0" err="1"/>
+              <a:t>core</a:t>
+            </a:r>
+            <a:endParaRPr lang="fr-FR" dirty="0"/>
+          </a:p>
+        </p:txBody>
+      </p:sp>
+      <p:sp>
+        <p:nvSpPr>
+          <p:cNvPr id="3" name="Espace réservé du contenu 2">
+            <a:extLst>
+              <a:ext uri="{FF2B5EF4-FFF2-40B4-BE49-F238E27FC236}">
+                <a16:creationId xmlns:a16="http://schemas.microsoft.com/office/drawing/2014/main" id="{C7B020B0-1864-6882-55C3-CD36FA0778DA}"/>
+              </a:ext>
+            </a:extLst>
+          </p:cNvPr>
+          <p:cNvSpPr>
+            <a:spLocks noGrp="1"/>
+          </p:cNvSpPr>
+          <p:nvPr>
+            <p:ph idx="1"/>
+          </p:nvPr>
+        </p:nvSpPr>
+        <p:spPr/>
+        <p:txBody>
+          <a:bodyPr/>
+          <a:lstStyle/>
+          <a:p>
+            <a:r>
+              <a:rPr lang="fr-FR" dirty="0"/>
+              <a:t>Nativement </a:t>
+            </a:r>
+            <a:r>
+              <a:rPr lang="fr-FR" dirty="0" err="1"/>
+              <a:t>ExecuTorch</a:t>
+            </a:r>
+            <a:r>
+              <a:rPr lang="fr-FR" dirty="0"/>
+              <a:t> est multi-</a:t>
+            </a:r>
+            <a:r>
+              <a:rPr lang="fr-FR" dirty="0" err="1"/>
+              <a:t>core</a:t>
+            </a:r>
+            <a:r>
+              <a:rPr lang="fr-FR" dirty="0"/>
+              <a:t> et GPU</a:t>
+            </a:r>
+          </a:p>
+          <a:p>
+            <a:r>
+              <a:rPr lang="fr-FR" dirty="0"/>
+              <a:t>Mais les plateformes </a:t>
+            </a:r>
+            <a:r>
+              <a:rPr lang="fr-FR" dirty="0" err="1"/>
+              <a:t>ExecuTorch</a:t>
+            </a:r>
+            <a:r>
+              <a:rPr lang="fr-FR" dirty="0"/>
+              <a:t> peuvent être compatibles NPU et DSP</a:t>
+            </a:r>
+          </a:p>
+        </p:txBody>
+      </p:sp>
+    </p:spTree>
+    <p:extLst>
+      <p:ext uri="{BB962C8B-B14F-4D97-AF65-F5344CB8AC3E}">
+        <p14:creationId xmlns:p14="http://schemas.microsoft.com/office/powerpoint/2010/main" val="2388362453"/>
+      </p:ext>
+    </p:extLst>
+  </p:cSld>
+  <p:clrMapOvr>
+    <a:masterClrMapping/>
+  </p:clrMapOvr>
+</p:sld>
+</file>
+
+<file path=ppt/slides/slide3.xml><?xml version="1.0" encoding="utf-8"?>
+<p:sld xmlns:a="http://schemas.openxmlformats.org/drawingml/2006/main" xmlns:r="http://schemas.openxmlformats.org/officeDocument/2006/relationships" xmlns:p="http://schemas.openxmlformats.org/presentationml/2006/main">
+  <p:cSld>
+    <p:spTree>
+      <p:nvGrpSpPr>
+        <p:cNvPr id="1" name=""/>
+        <p:cNvGrpSpPr/>
+        <p:nvPr/>
+      </p:nvGrpSpPr>
+      <p:grpSpPr>
+        <a:xfrm>
+          <a:off x="0" y="0"/>
+          <a:ext cx="0" cy="0"/>
+          <a:chOff x="0" y="0"/>
+          <a:chExt cx="0" cy="0"/>
+        </a:xfrm>
+      </p:grpSpPr>
+      <p:sp>
+        <p:nvSpPr>
+          <p:cNvPr id="2" name="Titre 1">
+            <a:extLst>
+              <a:ext uri="{FF2B5EF4-FFF2-40B4-BE49-F238E27FC236}">
+                <a16:creationId xmlns:a16="http://schemas.microsoft.com/office/drawing/2014/main" id="{A42B199A-8DF6-D257-4F1A-DF7667B405D4}"/>
+              </a:ext>
+            </a:extLst>
+          </p:cNvPr>
+          <p:cNvSpPr>
+            <a:spLocks noGrp="1"/>
+          </p:cNvSpPr>
+          <p:nvPr>
+            <p:ph type="title"/>
+          </p:nvPr>
+        </p:nvSpPr>
+        <p:spPr/>
+        <p:txBody>
+          <a:bodyPr/>
+          <a:lstStyle/>
+          <a:p>
+            <a:r>
+              <a:rPr lang="fr-FR" dirty="0"/>
+              <a:t>NPU</a:t>
+            </a:r>
+          </a:p>
+        </p:txBody>
+      </p:sp>
+      <p:sp>
+        <p:nvSpPr>
+          <p:cNvPr id="3" name="Espace réservé du contenu 2">
+            <a:extLst>
+              <a:ext uri="{FF2B5EF4-FFF2-40B4-BE49-F238E27FC236}">
+                <a16:creationId xmlns:a16="http://schemas.microsoft.com/office/drawing/2014/main" id="{B536F32A-0857-EB4A-50C1-A16DAC7546D9}"/>
+              </a:ext>
+            </a:extLst>
+          </p:cNvPr>
+          <p:cNvSpPr>
+            <a:spLocks noGrp="1"/>
+          </p:cNvSpPr>
+          <p:nvPr>
+            <p:ph idx="1"/>
+          </p:nvPr>
+        </p:nvSpPr>
+        <p:spPr/>
+        <p:txBody>
+          <a:bodyPr/>
+          <a:lstStyle/>
+          <a:p>
+            <a:r>
+              <a:rPr lang="fr-FR" dirty="0"/>
+              <a:t>Un Neural </a:t>
+            </a:r>
+            <a:r>
+              <a:rPr lang="fr-FR" dirty="0" err="1"/>
+              <a:t>Processing</a:t>
+            </a:r>
+            <a:r>
+              <a:rPr lang="fr-FR" dirty="0"/>
+              <a:t> Unit est un microprocesseur conçu pour accélérer un réseau de neurones</a:t>
+            </a:r>
+          </a:p>
+          <a:p>
+            <a:r>
+              <a:rPr lang="fr-FR" dirty="0"/>
+              <a:t>Il s'agit souvent de conceptions multicœurs et se concentrant :</a:t>
+            </a:r>
+          </a:p>
+          <a:p>
+            <a:pPr lvl="1"/>
+            <a:r>
+              <a:rPr lang="fr-FR" dirty="0"/>
+              <a:t>Sur l'arithmétique de faible précision</a:t>
+            </a:r>
+          </a:p>
+          <a:p>
+            <a:pPr lvl="1"/>
+            <a:r>
+              <a:rPr lang="fr-FR" dirty="0"/>
+              <a:t>Des nouvelles architectures de flux de données</a:t>
+            </a:r>
+          </a:p>
+          <a:p>
+            <a:r>
+              <a:rPr lang="fr-FR" dirty="0"/>
+              <a:t>Il n'y a pas de définition précise autre que Accélérateur d'IA</a:t>
+            </a:r>
+          </a:p>
+          <a:p>
+            <a:pPr lvl="1"/>
+            <a:r>
+              <a:rPr lang="fr-FR" dirty="0"/>
+              <a:t>Il en existe plusieurs types de plusieurs marques</a:t>
+            </a:r>
+          </a:p>
+          <a:p>
+            <a:endParaRPr lang="fr-FR" dirty="0"/>
+          </a:p>
+        </p:txBody>
+      </p:sp>
+    </p:spTree>
+    <p:extLst>
+      <p:ext uri="{BB962C8B-B14F-4D97-AF65-F5344CB8AC3E}">
+        <p14:creationId xmlns:p14="http://schemas.microsoft.com/office/powerpoint/2010/main" val="3630926175"/>
+      </p:ext>
+    </p:extLst>
+  </p:cSld>
+  <p:clrMapOvr>
+    <a:masterClrMapping/>
+  </p:clrMapOvr>
+</p:sld>
+</file>
+
+<file path=ppt/slides/slide4.xml><?xml version="1.0" encoding="utf-8"?>
+<p:sld xmlns:a="http://schemas.openxmlformats.org/drawingml/2006/main" xmlns:r="http://schemas.openxmlformats.org/officeDocument/2006/relationships" xmlns:p="http://schemas.openxmlformats.org/presentationml/2006/main">
+  <p:cSld>
+    <p:spTree>
+      <p:nvGrpSpPr>
+        <p:cNvPr id="1" name=""/>
+        <p:cNvGrpSpPr/>
+        <p:nvPr/>
+      </p:nvGrpSpPr>
+      <p:grpSpPr>
+        <a:xfrm>
+          <a:off x="0" y="0"/>
+          <a:ext cx="0" cy="0"/>
+          <a:chOff x="0" y="0"/>
+          <a:chExt cx="0" cy="0"/>
+        </a:xfrm>
+      </p:grpSpPr>
+      <p:sp>
+        <p:nvSpPr>
+          <p:cNvPr id="2" name="Titre 1">
+            <a:extLst>
+              <a:ext uri="{FF2B5EF4-FFF2-40B4-BE49-F238E27FC236}">
+                <a16:creationId xmlns:a16="http://schemas.microsoft.com/office/drawing/2014/main" id="{D197C961-F347-464D-BA8C-EBC7EF78629D}"/>
+              </a:ext>
+            </a:extLst>
+          </p:cNvPr>
+          <p:cNvSpPr>
+            <a:spLocks noGrp="1"/>
+          </p:cNvSpPr>
+          <p:nvPr>
+            <p:ph type="title"/>
+          </p:nvPr>
+        </p:nvSpPr>
+        <p:spPr/>
+        <p:txBody>
+          <a:bodyPr/>
+          <a:lstStyle/>
+          <a:p>
+            <a:r>
+              <a:rPr lang="fr-FR" dirty="0"/>
+              <a:t>NPU</a:t>
+            </a:r>
+          </a:p>
+        </p:txBody>
+      </p:sp>
+      <p:sp>
+        <p:nvSpPr>
+          <p:cNvPr id="3" name="Espace réservé du contenu 2">
+            <a:extLst>
+              <a:ext uri="{FF2B5EF4-FFF2-40B4-BE49-F238E27FC236}">
+                <a16:creationId xmlns:a16="http://schemas.microsoft.com/office/drawing/2014/main" id="{8DCB3148-4E7F-EC6D-2590-49558179FA5A}"/>
+              </a:ext>
+            </a:extLst>
+          </p:cNvPr>
+          <p:cNvSpPr>
+            <a:spLocks noGrp="1"/>
+          </p:cNvSpPr>
+          <p:nvPr>
+            <p:ph idx="1"/>
+          </p:nvPr>
+        </p:nvSpPr>
+        <p:spPr/>
+        <p:txBody>
+          <a:bodyPr/>
+          <a:lstStyle/>
+          <a:p>
+            <a:r>
+              <a:rPr lang="fr-FR" dirty="0"/>
+              <a:t>Un NPU est de conception GPU</a:t>
+            </a:r>
+          </a:p>
+          <a:p>
+            <a:pPr lvl="1"/>
+            <a:r>
+              <a:rPr lang="fr-FR" dirty="0"/>
+              <a:t>Les commandes 3D ou Video2d ont été enlevées</a:t>
+            </a:r>
+          </a:p>
+          <a:p>
+            <a:r>
+              <a:rPr lang="fr-FR" dirty="0"/>
+              <a:t>Très souvent dédié aux int8 ou inférieur</a:t>
+            </a:r>
+          </a:p>
+          <a:p>
+            <a:pPr lvl="1"/>
+            <a:r>
+              <a:rPr lang="fr-FR" dirty="0"/>
+              <a:t>Des fois fp32 ou fp16</a:t>
+            </a:r>
+          </a:p>
+          <a:p>
+            <a:r>
+              <a:rPr lang="fr-FR" dirty="0"/>
+              <a:t>Orienté flux de données</a:t>
+            </a:r>
+          </a:p>
+          <a:p>
+            <a:pPr lvl="1"/>
+            <a:r>
+              <a:rPr lang="fr-FR" dirty="0"/>
+              <a:t>Les données sont en vecteur et non en matrice comme dans les </a:t>
+            </a:r>
+            <a:r>
+              <a:rPr lang="fr-FR" dirty="0" err="1"/>
+              <a:t>GPUs</a:t>
+            </a:r>
+            <a:endParaRPr lang="fr-FR" dirty="0"/>
+          </a:p>
+          <a:p>
+            <a:pPr lvl="1"/>
+            <a:r>
+              <a:rPr lang="fr-FR" dirty="0"/>
+              <a:t>L'inférence est séquentielle et vide les </a:t>
+            </a:r>
+            <a:r>
+              <a:rPr lang="fr-FR" dirty="0" err="1"/>
+              <a:t>layers</a:t>
+            </a:r>
+            <a:r>
+              <a:rPr lang="fr-FR" dirty="0"/>
+              <a:t> l-2 (l-3 si </a:t>
+            </a:r>
+            <a:r>
+              <a:rPr lang="fr-FR" dirty="0" err="1"/>
+              <a:t>ResNet</a:t>
+            </a:r>
+            <a:r>
+              <a:rPr lang="fr-FR" dirty="0"/>
+              <a:t>)</a:t>
+            </a:r>
+          </a:p>
+          <a:p>
+            <a:pPr lvl="1"/>
+            <a:r>
+              <a:rPr lang="fr-FR" dirty="0"/>
+              <a:t>Tabulation des fonctions trigo en </a:t>
+            </a:r>
+            <a:r>
+              <a:rPr lang="fr-FR" dirty="0" err="1"/>
+              <a:t>int</a:t>
+            </a:r>
+            <a:endParaRPr lang="fr-FR" dirty="0"/>
+          </a:p>
+          <a:p>
+            <a:pPr lvl="1"/>
+            <a:endParaRPr lang="fr-FR" dirty="0"/>
+          </a:p>
+          <a:p>
+            <a:endParaRPr lang="fr-FR" dirty="0"/>
+          </a:p>
+          <a:p>
+            <a:pPr lvl="1"/>
+            <a:endParaRPr lang="fr-FR" dirty="0"/>
+          </a:p>
+        </p:txBody>
+      </p:sp>
+    </p:spTree>
+    <p:extLst>
+      <p:ext uri="{BB962C8B-B14F-4D97-AF65-F5344CB8AC3E}">
+        <p14:creationId xmlns:p14="http://schemas.microsoft.com/office/powerpoint/2010/main" val="2430736519"/>
+      </p:ext>
+    </p:extLst>
+  </p:cSld>
+  <p:clrMapOvr>
+    <a:masterClrMapping/>
+  </p:clrMapOvr>
+</p:sld>
+</file>
+
+<file path=ppt/slides/slide5.xml><?xml version="1.0" encoding="utf-8"?>
+<p:sld xmlns:a="http://schemas.openxmlformats.org/drawingml/2006/main" xmlns:r="http://schemas.openxmlformats.org/officeDocument/2006/relationships" xmlns:p="http://schemas.openxmlformats.org/presentationml/2006/main">
+  <p:cSld>
+    <p:spTree>
+      <p:nvGrpSpPr>
+        <p:cNvPr id="1" name=""/>
+        <p:cNvGrpSpPr/>
+        <p:nvPr/>
+      </p:nvGrpSpPr>
+      <p:grpSpPr>
+        <a:xfrm>
+          <a:off x="0" y="0"/>
+          <a:ext cx="0" cy="0"/>
+          <a:chOff x="0" y="0"/>
+          <a:chExt cx="0" cy="0"/>
+        </a:xfrm>
+      </p:grpSpPr>
+      <p:sp>
+        <p:nvSpPr>
+          <p:cNvPr id="2" name="Titre 1">
+            <a:extLst>
+              <a:ext uri="{FF2B5EF4-FFF2-40B4-BE49-F238E27FC236}">
+                <a16:creationId xmlns:a16="http://schemas.microsoft.com/office/drawing/2014/main" id="{C79C94A9-E3AA-7FC2-C7C2-5E8ED32B2769}"/>
+              </a:ext>
+            </a:extLst>
+          </p:cNvPr>
+          <p:cNvSpPr>
+            <a:spLocks noGrp="1"/>
+          </p:cNvSpPr>
+          <p:nvPr>
+            <p:ph type="title"/>
+          </p:nvPr>
+        </p:nvSpPr>
+        <p:spPr/>
+        <p:txBody>
+          <a:bodyPr/>
+          <a:lstStyle/>
+          <a:p>
+            <a:r>
+              <a:rPr lang="fr-FR" dirty="0"/>
+              <a:t>Historique</a:t>
+            </a:r>
+          </a:p>
+        </p:txBody>
+      </p:sp>
+      <p:sp>
+        <p:nvSpPr>
+          <p:cNvPr id="3" name="Espace réservé du contenu 2">
+            <a:extLst>
+              <a:ext uri="{FF2B5EF4-FFF2-40B4-BE49-F238E27FC236}">
+                <a16:creationId xmlns:a16="http://schemas.microsoft.com/office/drawing/2014/main" id="{4D35D9D8-1398-C9DF-7B7B-130D0DC3BA07}"/>
+              </a:ext>
+            </a:extLst>
+          </p:cNvPr>
+          <p:cNvSpPr>
+            <a:spLocks noGrp="1"/>
+          </p:cNvSpPr>
+          <p:nvPr>
+            <p:ph idx="1"/>
+          </p:nvPr>
+        </p:nvSpPr>
+        <p:spPr/>
+        <p:txBody>
+          <a:bodyPr/>
+          <a:lstStyle/>
+          <a:p>
+            <a:r>
+              <a:rPr lang="fr-FR" dirty="0"/>
+              <a:t>Les tout premiers NPU étaient des CPU ou FPU</a:t>
+            </a:r>
+          </a:p>
+          <a:p>
+            <a:pPr lvl="1"/>
+            <a:r>
+              <a:rPr lang="fr-FR" dirty="0"/>
+              <a:t>16 bits Motorola 68030</a:t>
+            </a:r>
+          </a:p>
+          <a:p>
+            <a:pPr lvl="1"/>
+            <a:r>
+              <a:rPr lang="fr-FR" dirty="0"/>
+              <a:t>32 bits FPU Intel</a:t>
+            </a:r>
+          </a:p>
+          <a:p>
+            <a:r>
+              <a:rPr lang="fr-FR" dirty="0"/>
+              <a:t>Les NPU suivants étaient des DSP</a:t>
+            </a:r>
+          </a:p>
+          <a:p>
+            <a:r>
+              <a:rPr lang="fr-FR" dirty="0"/>
+              <a:t>Certains NPU sont des GPU simplifiés</a:t>
+            </a:r>
+          </a:p>
+          <a:p>
+            <a:pPr lvl="1"/>
+            <a:r>
+              <a:rPr lang="fr-FR" dirty="0" err="1"/>
+              <a:t>NVidia</a:t>
+            </a:r>
+            <a:endParaRPr lang="fr-FR" dirty="0"/>
+          </a:p>
+          <a:p>
+            <a:r>
+              <a:rPr lang="fr-FR" dirty="0"/>
+              <a:t>ASIC</a:t>
+            </a:r>
+          </a:p>
+          <a:p>
+            <a:pPr lvl="1"/>
+            <a:r>
+              <a:rPr lang="fr-FR" dirty="0"/>
+              <a:t>Un NPU est aujourd'hui un circuit intégré spécifique à une application dérivé d'un GPU</a:t>
+            </a:r>
+          </a:p>
+        </p:txBody>
+      </p:sp>
+    </p:spTree>
+    <p:extLst>
+      <p:ext uri="{BB962C8B-B14F-4D97-AF65-F5344CB8AC3E}">
+        <p14:creationId xmlns:p14="http://schemas.microsoft.com/office/powerpoint/2010/main" val="3802658879"/>
+      </p:ext>
+    </p:extLst>
+  </p:cSld>
+  <p:clrMapOvr>
+    <a:masterClrMapping/>
+  </p:clrMapOvr>
+</p:sld>
+</file>
+
+<file path=ppt/slides/slide6.xml><?xml version="1.0" encoding="utf-8"?>
+<p:sld xmlns:a="http://schemas.openxmlformats.org/drawingml/2006/main" xmlns:r="http://schemas.openxmlformats.org/officeDocument/2006/relationships" xmlns:p="http://schemas.openxmlformats.org/presentationml/2006/main">
+  <p:cSld>
+    <p:spTree>
+      <p:nvGrpSpPr>
+        <p:cNvPr id="1" name=""/>
+        <p:cNvGrpSpPr/>
+        <p:nvPr/>
+      </p:nvGrpSpPr>
+      <p:grpSpPr>
+        <a:xfrm>
+          <a:off x="0" y="0"/>
+          <a:ext cx="0" cy="0"/>
+          <a:chOff x="0" y="0"/>
+          <a:chExt cx="0" cy="0"/>
+        </a:xfrm>
+      </p:grpSpPr>
+      <p:sp>
+        <p:nvSpPr>
+          <p:cNvPr id="2" name="Titre 1">
+            <a:extLst>
+              <a:ext uri="{FF2B5EF4-FFF2-40B4-BE49-F238E27FC236}">
+                <a16:creationId xmlns:a16="http://schemas.microsoft.com/office/drawing/2014/main" id="{B3EF3129-9C8D-900A-C3C8-31B57E0ED1A8}"/>
+              </a:ext>
+            </a:extLst>
+          </p:cNvPr>
+          <p:cNvSpPr>
+            <a:spLocks noGrp="1"/>
+          </p:cNvSpPr>
+          <p:nvPr>
+            <p:ph type="title"/>
+          </p:nvPr>
+        </p:nvSpPr>
+        <p:spPr/>
+        <p:txBody>
+          <a:bodyPr/>
+          <a:lstStyle/>
+          <a:p>
+            <a:r>
+              <a:rPr lang="fr-FR" dirty="0"/>
+              <a:t>Liste des principaux NPU</a:t>
+            </a:r>
+          </a:p>
+        </p:txBody>
+      </p:sp>
+      <p:sp>
+        <p:nvSpPr>
+          <p:cNvPr id="3" name="Espace réservé du contenu 2">
+            <a:extLst>
+              <a:ext uri="{FF2B5EF4-FFF2-40B4-BE49-F238E27FC236}">
+                <a16:creationId xmlns:a16="http://schemas.microsoft.com/office/drawing/2014/main" id="{3C6D2A0B-2F59-5425-AC5B-BE2592817844}"/>
+              </a:ext>
+            </a:extLst>
+          </p:cNvPr>
+          <p:cNvSpPr>
+            <a:spLocks noGrp="1"/>
+          </p:cNvSpPr>
+          <p:nvPr>
+            <p:ph idx="1"/>
+          </p:nvPr>
+        </p:nvSpPr>
+        <p:spPr/>
+        <p:txBody>
+          <a:bodyPr/>
+          <a:lstStyle/>
+          <a:p>
+            <a:r>
+              <a:rPr lang="fr-FR" dirty="0"/>
+              <a:t>Sur PC Intel, </a:t>
+            </a:r>
+            <a:r>
+              <a:rPr lang="fr-FR" dirty="0" err="1"/>
+              <a:t>Qualcom</a:t>
+            </a:r>
+            <a:r>
+              <a:rPr lang="fr-FR" dirty="0"/>
+              <a:t> ARM et AMD intègrent des NPU natifs</a:t>
+            </a:r>
+          </a:p>
+          <a:p>
+            <a:r>
+              <a:rPr lang="fr-FR" dirty="0"/>
+              <a:t>En téléphonie Apple, Google et </a:t>
+            </a:r>
+            <a:r>
+              <a:rPr lang="fr-FR" dirty="0" err="1"/>
+              <a:t>Qualcom</a:t>
+            </a:r>
+            <a:r>
+              <a:rPr lang="fr-FR" dirty="0"/>
+              <a:t> en intègre également</a:t>
+            </a:r>
+          </a:p>
+          <a:p>
+            <a:r>
+              <a:rPr lang="fr-FR" dirty="0"/>
+              <a:t>En embarqué</a:t>
+            </a:r>
+          </a:p>
+          <a:p>
+            <a:pPr lvl="1"/>
+            <a:r>
+              <a:rPr lang="fr-FR" dirty="0"/>
+              <a:t>NXP i.MX : le plus utilisé en industrie</a:t>
+            </a:r>
+          </a:p>
+          <a:p>
+            <a:pPr lvl="1"/>
+            <a:r>
+              <a:rPr lang="fr-FR" dirty="0" err="1"/>
+              <a:t>Rockchip</a:t>
+            </a:r>
+            <a:r>
+              <a:rPr lang="fr-FR" dirty="0"/>
+              <a:t> RK3588 : IoT</a:t>
+            </a:r>
+          </a:p>
+          <a:p>
+            <a:pPr lvl="1"/>
+            <a:r>
+              <a:rPr lang="fr-FR" dirty="0"/>
+              <a:t>Hailo-8 / H8 : vision</a:t>
+            </a:r>
+          </a:p>
+          <a:p>
+            <a:pPr lvl="1"/>
+            <a:r>
+              <a:rPr lang="fr-FR" dirty="0" err="1"/>
+              <a:t>MemryX</a:t>
+            </a:r>
+            <a:endParaRPr lang="fr-FR" dirty="0"/>
+          </a:p>
+          <a:p>
+            <a:pPr lvl="1"/>
+            <a:r>
+              <a:rPr lang="fr-FR" dirty="0" err="1"/>
+              <a:t>DeepX</a:t>
+            </a:r>
+            <a:endParaRPr lang="fr-FR" dirty="0"/>
+          </a:p>
+          <a:p>
+            <a:pPr lvl="1"/>
+            <a:r>
+              <a:rPr lang="fr-FR" dirty="0" err="1"/>
+              <a:t>NVidia</a:t>
+            </a:r>
+            <a:endParaRPr lang="fr-FR" dirty="0"/>
+          </a:p>
+          <a:p>
+            <a:pPr lvl="1"/>
+            <a:endParaRPr lang="fr-FR" dirty="0"/>
+          </a:p>
+          <a:p>
+            <a:pPr lvl="1"/>
+            <a:endParaRPr lang="fr-FR" dirty="0"/>
+          </a:p>
+        </p:txBody>
+      </p:sp>
+    </p:spTree>
+    <p:extLst>
+      <p:ext uri="{BB962C8B-B14F-4D97-AF65-F5344CB8AC3E}">
+        <p14:creationId xmlns:p14="http://schemas.microsoft.com/office/powerpoint/2010/main" val="3492214614"/>
+      </p:ext>
+    </p:extLst>
+  </p:cSld>
+  <p:clrMapOvr>
+    <a:masterClrMapping/>
+  </p:clrMapOvr>
+</p:sld>
+</file>
+
+<file path=ppt/slides/slide7.xml><?xml version="1.0" encoding="utf-8"?>
+<p:sld xmlns:a="http://schemas.openxmlformats.org/drawingml/2006/main" xmlns:r="http://schemas.openxmlformats.org/officeDocument/2006/relationships" xmlns:p="http://schemas.openxmlformats.org/presentationml/2006/main">
+  <p:cSld>
+    <p:spTree>
+      <p:nvGrpSpPr>
+        <p:cNvPr id="1" name=""/>
+        <p:cNvGrpSpPr/>
+        <p:nvPr/>
+      </p:nvGrpSpPr>
+      <p:grpSpPr>
+        <a:xfrm>
+          <a:off x="0" y="0"/>
+          <a:ext cx="0" cy="0"/>
+          <a:chOff x="0" y="0"/>
+          <a:chExt cx="0" cy="0"/>
+        </a:xfrm>
+      </p:grpSpPr>
+      <p:sp>
+        <p:nvSpPr>
+          <p:cNvPr id="2" name="Titre 1">
+            <a:extLst>
+              <a:ext uri="{FF2B5EF4-FFF2-40B4-BE49-F238E27FC236}">
+                <a16:creationId xmlns:a16="http://schemas.microsoft.com/office/drawing/2014/main" id="{FC5E4D45-0212-992C-6DB0-14876C5B99D3}"/>
+              </a:ext>
+            </a:extLst>
+          </p:cNvPr>
+          <p:cNvSpPr>
+            <a:spLocks noGrp="1"/>
+          </p:cNvSpPr>
+          <p:nvPr>
+            <p:ph type="title"/>
+          </p:nvPr>
+        </p:nvSpPr>
+        <p:spPr/>
+        <p:txBody>
+          <a:bodyPr/>
+          <a:lstStyle/>
+          <a:p>
+            <a:r>
+              <a:rPr lang="fr-FR" dirty="0"/>
+              <a:t>DPU</a:t>
+            </a:r>
+          </a:p>
+        </p:txBody>
+      </p:sp>
+      <p:sp>
+        <p:nvSpPr>
+          <p:cNvPr id="3" name="Espace réservé du contenu 2">
+            <a:extLst>
+              <a:ext uri="{FF2B5EF4-FFF2-40B4-BE49-F238E27FC236}">
+                <a16:creationId xmlns:a16="http://schemas.microsoft.com/office/drawing/2014/main" id="{B720FB51-D010-7147-EBDE-E680FE16BE1E}"/>
+              </a:ext>
+            </a:extLst>
+          </p:cNvPr>
+          <p:cNvSpPr>
+            <a:spLocks noGrp="1"/>
+          </p:cNvSpPr>
+          <p:nvPr>
+            <p:ph idx="1"/>
+          </p:nvPr>
+        </p:nvSpPr>
+        <p:spPr/>
+        <p:txBody>
+          <a:bodyPr/>
+          <a:lstStyle/>
+          <a:p>
+            <a:r>
+              <a:rPr lang="fr-FR" dirty="0"/>
+              <a:t>Un Data </a:t>
+            </a:r>
+            <a:r>
+              <a:rPr lang="fr-FR" dirty="0" err="1"/>
+              <a:t>Processing</a:t>
+            </a:r>
+            <a:r>
+              <a:rPr lang="fr-FR" dirty="0"/>
+              <a:t> Unit est un processeur spécialisé qui</a:t>
+            </a:r>
+          </a:p>
+          <a:p>
+            <a:pPr lvl="1"/>
+            <a:r>
+              <a:rPr lang="fr-FR" dirty="0"/>
+              <a:t>gère les flux de données</a:t>
+            </a:r>
+          </a:p>
+          <a:p>
+            <a:pPr lvl="1"/>
+            <a:r>
+              <a:rPr lang="fr-FR" dirty="0"/>
+              <a:t>accélère les tâches de réseau</a:t>
+            </a:r>
+          </a:p>
+          <a:p>
+            <a:pPr lvl="1"/>
+            <a:r>
+              <a:rPr lang="fr-FR" dirty="0"/>
+              <a:t>stockage</a:t>
+            </a:r>
+          </a:p>
+          <a:p>
+            <a:pPr lvl="1"/>
+            <a:r>
+              <a:rPr lang="fr-FR" dirty="0"/>
+              <a:t>sécurité</a:t>
+            </a:r>
+          </a:p>
+          <a:p>
+            <a:pPr lvl="1"/>
+            <a:r>
+              <a:rPr lang="fr-FR" dirty="0"/>
+              <a:t>soulage le CPU, NPU et GPU</a:t>
+            </a:r>
+          </a:p>
+        </p:txBody>
+      </p:sp>
+    </p:spTree>
+    <p:extLst>
+      <p:ext uri="{BB962C8B-B14F-4D97-AF65-F5344CB8AC3E}">
+        <p14:creationId xmlns:p14="http://schemas.microsoft.com/office/powerpoint/2010/main" val="371425266"/>
+      </p:ext>
+    </p:extLst>
+  </p:cSld>
+  <p:clrMapOvr>
+    <a:masterClrMapping/>
+  </p:clrMapOvr>
+</p:sld>
+</file>
+
+<file path=ppt/slides/slide8.xml><?xml version="1.0" encoding="utf-8"?>
+<p:sld xmlns:a="http://schemas.openxmlformats.org/drawingml/2006/main" xmlns:r="http://schemas.openxmlformats.org/officeDocument/2006/relationships" xmlns:p="http://schemas.openxmlformats.org/presentationml/2006/main">
+  <p:cSld>
+    <p:spTree>
+      <p:nvGrpSpPr>
+        <p:cNvPr id="1" name=""/>
+        <p:cNvGrpSpPr/>
+        <p:nvPr/>
+      </p:nvGrpSpPr>
+      <p:grpSpPr>
+        <a:xfrm>
+          <a:off x="0" y="0"/>
+          <a:ext cx="0" cy="0"/>
+          <a:chOff x="0" y="0"/>
+          <a:chExt cx="0" cy="0"/>
+        </a:xfrm>
+      </p:grpSpPr>
+      <p:sp>
+        <p:nvSpPr>
+          <p:cNvPr id="2" name="Titre 1">
+            <a:extLst>
+              <a:ext uri="{FF2B5EF4-FFF2-40B4-BE49-F238E27FC236}">
+                <a16:creationId xmlns:a16="http://schemas.microsoft.com/office/drawing/2014/main" id="{47BBA520-5928-2D2C-8CB4-80C12F2328D6}"/>
+              </a:ext>
+            </a:extLst>
+          </p:cNvPr>
+          <p:cNvSpPr>
+            <a:spLocks noGrp="1"/>
+          </p:cNvSpPr>
+          <p:nvPr>
+            <p:ph type="title"/>
+          </p:nvPr>
+        </p:nvSpPr>
+        <p:spPr/>
+        <p:txBody>
+          <a:bodyPr/>
+          <a:lstStyle/>
+          <a:p>
+            <a:r>
+              <a:rPr lang="fr-FR" dirty="0"/>
+              <a:t>DPU</a:t>
+            </a:r>
+          </a:p>
+        </p:txBody>
+      </p:sp>
+      <p:sp>
+        <p:nvSpPr>
+          <p:cNvPr id="3" name="Espace réservé du contenu 2">
+            <a:extLst>
+              <a:ext uri="{FF2B5EF4-FFF2-40B4-BE49-F238E27FC236}">
+                <a16:creationId xmlns:a16="http://schemas.microsoft.com/office/drawing/2014/main" id="{E516E04F-84AB-E8E0-47CB-4F9CA3DFCA31}"/>
+              </a:ext>
+            </a:extLst>
+          </p:cNvPr>
+          <p:cNvSpPr>
+            <a:spLocks noGrp="1"/>
+          </p:cNvSpPr>
+          <p:nvPr>
+            <p:ph idx="1"/>
+          </p:nvPr>
+        </p:nvSpPr>
+        <p:spPr/>
+        <p:txBody>
+          <a:bodyPr/>
+          <a:lstStyle/>
+          <a:p>
+            <a:r>
+              <a:rPr lang="fr-FR" dirty="0"/>
+              <a:t>On le considère comme le 3ᵉ pilier du calcul</a:t>
+            </a:r>
+          </a:p>
+          <a:p>
+            <a:pPr lvl="1"/>
+            <a:r>
+              <a:rPr lang="fr-FR" dirty="0"/>
+              <a:t>CPU → logique générale</a:t>
+            </a:r>
+          </a:p>
+          <a:p>
+            <a:pPr lvl="1"/>
+            <a:r>
+              <a:rPr lang="fr-FR" dirty="0"/>
+              <a:t>GPU, NPU → calcul massif (IA)</a:t>
+            </a:r>
+          </a:p>
+          <a:p>
+            <a:pPr lvl="1"/>
+            <a:r>
+              <a:rPr lang="fr-FR" dirty="0"/>
+              <a:t>DPU → gestion des données</a:t>
+            </a:r>
+          </a:p>
+        </p:txBody>
+      </p:sp>
+    </p:spTree>
+    <p:extLst>
+      <p:ext uri="{BB962C8B-B14F-4D97-AF65-F5344CB8AC3E}">
+        <p14:creationId xmlns:p14="http://schemas.microsoft.com/office/powerpoint/2010/main" val="1619316229"/>
+      </p:ext>
+    </p:extLst>
+  </p:cSld>
+  <p:clrMapOvr>
+    <a:masterClrMapping/>
+  </p:clrMapOvr>
+</p:sld>
+</file>
+
+<file path=ppt/slides/slide9.xml><?xml version="1.0" encoding="utf-8"?>
+<p:sld xmlns:a="http://schemas.openxmlformats.org/drawingml/2006/main" xmlns:r="http://schemas.openxmlformats.org/officeDocument/2006/relationships" xmlns:p="http://schemas.openxmlformats.org/presentationml/2006/main">
+  <p:cSld>
+    <p:spTree>
+      <p:nvGrpSpPr>
+        <p:cNvPr id="1" name=""/>
+        <p:cNvGrpSpPr/>
+        <p:nvPr/>
+      </p:nvGrpSpPr>
+      <p:grpSpPr>
+        <a:xfrm>
+          <a:off x="0" y="0"/>
+          <a:ext cx="0" cy="0"/>
+          <a:chOff x="0" y="0"/>
+          <a:chExt cx="0" cy="0"/>
+        </a:xfrm>
+      </p:grpSpPr>
+      <p:sp>
+        <p:nvSpPr>
+          <p:cNvPr id="2" name="Titre 1">
+            <a:extLst>
+              <a:ext uri="{FF2B5EF4-FFF2-40B4-BE49-F238E27FC236}">
+                <a16:creationId xmlns:a16="http://schemas.microsoft.com/office/drawing/2014/main" id="{3C921C32-8FCC-F423-8D75-6E75D6DBA52A}"/>
+              </a:ext>
+            </a:extLst>
+          </p:cNvPr>
+          <p:cNvSpPr>
+            <a:spLocks noGrp="1"/>
+          </p:cNvSpPr>
+          <p:nvPr>
+            <p:ph type="title"/>
+          </p:nvPr>
+        </p:nvSpPr>
+        <p:spPr/>
+        <p:txBody>
+          <a:bodyPr/>
+          <a:lstStyle/>
+          <a:p>
+            <a:r>
+              <a:rPr lang="fr-FR" dirty="0"/>
+              <a:t>DPU</a:t>
+            </a:r>
+          </a:p>
+        </p:txBody>
+      </p:sp>
+      <p:sp>
+        <p:nvSpPr>
+          <p:cNvPr id="3" name="Espace réservé du contenu 2">
+            <a:extLst>
+              <a:ext uri="{FF2B5EF4-FFF2-40B4-BE49-F238E27FC236}">
+                <a16:creationId xmlns:a16="http://schemas.microsoft.com/office/drawing/2014/main" id="{70D9D5CD-46EB-F542-26E9-AFEF12FB16BE}"/>
+              </a:ext>
+            </a:extLst>
+          </p:cNvPr>
+          <p:cNvSpPr>
+            <a:spLocks noGrp="1"/>
+          </p:cNvSpPr>
+          <p:nvPr>
+            <p:ph idx="1"/>
+          </p:nvPr>
+        </p:nvSpPr>
+        <p:spPr/>
+        <p:txBody>
+          <a:bodyPr/>
+          <a:lstStyle/>
+          <a:p>
+            <a:r>
+              <a:rPr lang="fr-FR" dirty="0"/>
+              <a:t>Un DPU ne fait pas directement du </a:t>
+            </a:r>
+            <a:r>
+              <a:rPr lang="fr-FR" dirty="0" err="1"/>
+              <a:t>deep</a:t>
+            </a:r>
+            <a:r>
+              <a:rPr lang="fr-FR" dirty="0"/>
+              <a:t> </a:t>
+            </a:r>
+            <a:r>
+              <a:rPr lang="fr-FR" dirty="0" err="1"/>
+              <a:t>learning</a:t>
+            </a:r>
+            <a:r>
+              <a:rPr lang="fr-FR" dirty="0"/>
+              <a:t>, mais il est critique pour les performances globales</a:t>
+            </a:r>
+          </a:p>
+          <a:p>
+            <a:pPr lvl="1"/>
+            <a:r>
+              <a:rPr lang="fr-FR" dirty="0"/>
+              <a:t>transporte les données vers les GPU</a:t>
+            </a:r>
+          </a:p>
+          <a:p>
+            <a:pPr lvl="1"/>
+            <a:r>
+              <a:rPr lang="fr-FR" dirty="0"/>
+              <a:t>gère le réseau entre machines</a:t>
+            </a:r>
+          </a:p>
+          <a:p>
+            <a:pPr lvl="1"/>
+            <a:r>
+              <a:rPr lang="fr-FR" dirty="0"/>
+              <a:t>chiffre / sécurise les données</a:t>
+            </a:r>
+          </a:p>
+          <a:p>
+            <a:pPr lvl="1"/>
+            <a:r>
+              <a:rPr lang="fr-FR" dirty="0"/>
+              <a:t>optimise le stockage</a:t>
+            </a:r>
+          </a:p>
+          <a:p>
+            <a:pPr lvl="1"/>
+            <a:r>
+              <a:rPr lang="fr-FR" dirty="0"/>
+              <a:t>les GPU passent 100% de leur temps à calculer au lieu d’attendre les données.</a:t>
+            </a:r>
+          </a:p>
+        </p:txBody>
+      </p:sp>
+    </p:spTree>
+    <p:extLst>
+      <p:ext uri="{BB962C8B-B14F-4D97-AF65-F5344CB8AC3E}">
+        <p14:creationId xmlns:p14="http://schemas.microsoft.com/office/powerpoint/2010/main" val="54387403"/>
       </p:ext>
     </p:extLst>
   </p:cSld>

--- a/ppt/IoTAI30-NPU.pptx
+++ b/ppt/IoTAI30-NPU.pptx
@@ -5,10 +5,10 @@
     <p:sldMasterId id="2147483653" r:id="rId1"/>
   </p:sldMasterIdLst>
   <p:notesMasterIdLst>
-    <p:notesMasterId r:id="rId16"/>
+    <p:notesMasterId r:id="rId15"/>
   </p:notesMasterIdLst>
   <p:handoutMasterIdLst>
-    <p:handoutMasterId r:id="rId17"/>
+    <p:handoutMasterId r:id="rId16"/>
   </p:handoutMasterIdLst>
   <p:sldIdLst>
     <p:sldId id="264" r:id="rId2"/>
@@ -20,11 +20,10 @@
     <p:sldId id="274" r:id="rId8"/>
     <p:sldId id="275" r:id="rId9"/>
     <p:sldId id="276" r:id="rId10"/>
-    <p:sldId id="277" r:id="rId11"/>
-    <p:sldId id="270" r:id="rId12"/>
-    <p:sldId id="271" r:id="rId13"/>
-    <p:sldId id="272" r:id="rId14"/>
-    <p:sldId id="273" r:id="rId15"/>
+    <p:sldId id="270" r:id="rId11"/>
+    <p:sldId id="271" r:id="rId12"/>
+    <p:sldId id="272" r:id="rId13"/>
+    <p:sldId id="273" r:id="rId14"/>
   </p:sldIdLst>
   <p:sldSz cx="9144000" cy="6858000" type="screen4x3"/>
   <p:notesSz cx="6648450" cy="9782175"/>
@@ -3777,122 +3776,6 @@
           <a:chExt cx="0" cy="0"/>
         </a:xfrm>
       </p:grpSpPr>
-      <p:sp>
-        <p:nvSpPr>
-          <p:cNvPr id="2" name="Titre 1">
-            <a:extLst>
-              <a:ext uri="{FF2B5EF4-FFF2-40B4-BE49-F238E27FC236}">
-                <a16:creationId xmlns:a16="http://schemas.microsoft.com/office/drawing/2014/main" id="{84A15C67-4E69-BDB8-4979-EE69ED2FD1E5}"/>
-              </a:ext>
-            </a:extLst>
-          </p:cNvPr>
-          <p:cNvSpPr>
-            <a:spLocks noGrp="1"/>
-          </p:cNvSpPr>
-          <p:nvPr>
-            <p:ph type="title"/>
-          </p:nvPr>
-        </p:nvSpPr>
-        <p:spPr/>
-        <p:txBody>
-          <a:bodyPr/>
-          <a:lstStyle/>
-          <a:p>
-            <a:r>
-              <a:rPr lang="fr-FR" dirty="0"/>
-              <a:t>DPU Embarqué</a:t>
-            </a:r>
-          </a:p>
-        </p:txBody>
-      </p:sp>
-      <p:sp>
-        <p:nvSpPr>
-          <p:cNvPr id="3" name="Espace réservé du contenu 2">
-            <a:extLst>
-              <a:ext uri="{FF2B5EF4-FFF2-40B4-BE49-F238E27FC236}">
-                <a16:creationId xmlns:a16="http://schemas.microsoft.com/office/drawing/2014/main" id="{9C4A7E0B-F9A8-0836-F01C-FDB9D03ADFED}"/>
-              </a:ext>
-            </a:extLst>
-          </p:cNvPr>
-          <p:cNvSpPr>
-            <a:spLocks noGrp="1"/>
-          </p:cNvSpPr>
-          <p:nvPr>
-            <p:ph idx="1"/>
-          </p:nvPr>
-        </p:nvSpPr>
-        <p:spPr/>
-        <p:txBody>
-          <a:bodyPr/>
-          <a:lstStyle/>
-          <a:p>
-            <a:r>
-              <a:rPr lang="fr-FR" dirty="0"/>
-              <a:t>En embarqué un DPU peut être utilisé sans GPU ni NPU</a:t>
-            </a:r>
-          </a:p>
-          <a:p>
-            <a:pPr lvl="1"/>
-            <a:r>
-              <a:rPr lang="fr-FR" dirty="0"/>
-              <a:t>Le DPU sert alors de NPU</a:t>
-            </a:r>
-          </a:p>
-          <a:p>
-            <a:pPr lvl="1"/>
-            <a:r>
-              <a:rPr lang="fr-FR" dirty="0"/>
-              <a:t>Certains fabricants mélangent les NPU et DPU</a:t>
-            </a:r>
-          </a:p>
-          <a:p>
-            <a:pPr lvl="1"/>
-            <a:r>
-              <a:rPr lang="fr-FR" dirty="0"/>
-              <a:t>Voir </a:t>
-            </a:r>
-            <a:r>
-              <a:rPr lang="fr-FR"/>
-              <a:t>chapitre suivant</a:t>
-            </a:r>
-            <a:endParaRPr lang="fr-FR" dirty="0"/>
-          </a:p>
-          <a:p>
-            <a:pPr lvl="1"/>
-            <a:endParaRPr lang="fr-FR" dirty="0"/>
-          </a:p>
-        </p:txBody>
-      </p:sp>
-    </p:spTree>
-    <p:extLst>
-      <p:ext uri="{BB962C8B-B14F-4D97-AF65-F5344CB8AC3E}">
-        <p14:creationId xmlns:p14="http://schemas.microsoft.com/office/powerpoint/2010/main" val="2090868272"/>
-      </p:ext>
-    </p:extLst>
-  </p:cSld>
-  <p:clrMapOvr>
-    <a:masterClrMapping/>
-  </p:clrMapOvr>
-</p:sld>
-</file>
-
-<file path=ppt/slides/slide11.xml><?xml version="1.0" encoding="utf-8"?>
-<p:sld xmlns:a="http://schemas.openxmlformats.org/drawingml/2006/main" xmlns:r="http://schemas.openxmlformats.org/officeDocument/2006/relationships" xmlns:p="http://schemas.openxmlformats.org/presentationml/2006/main">
-  <p:cSld>
-    <p:spTree>
-      <p:nvGrpSpPr>
-        <p:cNvPr id="1" name=""/>
-        <p:cNvGrpSpPr/>
-        <p:nvPr/>
-      </p:nvGrpSpPr>
-      <p:grpSpPr>
-        <a:xfrm>
-          <a:off x="0" y="0"/>
-          <a:ext cx="0" cy="0"/>
-          <a:chOff x="0" y="0"/>
-          <a:chExt cx="0" cy="0"/>
-        </a:xfrm>
-      </p:grpSpPr>
       <p:pic>
         <p:nvPicPr>
           <p:cNvPr id="4" name="Image 3" descr="logo de NXP Semiconductors">
@@ -4031,7 +3914,7 @@
 </p:sld>
 </file>
 
-<file path=ppt/slides/slide12.xml><?xml version="1.0" encoding="utf-8"?>
+<file path=ppt/slides/slide11.xml><?xml version="1.0" encoding="utf-8"?>
 <p:sld xmlns:a="http://schemas.openxmlformats.org/drawingml/2006/main" xmlns:r="http://schemas.openxmlformats.org/officeDocument/2006/relationships" xmlns:p="http://schemas.openxmlformats.org/presentationml/2006/main">
   <p:cSld>
     <p:spTree>
@@ -4179,7 +4062,7 @@
 </p:sld>
 </file>
 
-<file path=ppt/slides/slide13.xml><?xml version="1.0" encoding="utf-8"?>
+<file path=ppt/slides/slide12.xml><?xml version="1.0" encoding="utf-8"?>
 <p:sld xmlns:a="http://schemas.openxmlformats.org/drawingml/2006/main" xmlns:r="http://schemas.openxmlformats.org/officeDocument/2006/relationships" xmlns:p="http://schemas.openxmlformats.org/presentationml/2006/main">
   <p:cSld>
     <p:spTree>
@@ -4312,7 +4195,7 @@
 </p:sld>
 </file>
 
-<file path=ppt/slides/slide14.xml><?xml version="1.0" encoding="utf-8"?>
+<file path=ppt/slides/slide13.xml><?xml version="1.0" encoding="utf-8"?>
 <p:sld xmlns:a="http://schemas.openxmlformats.org/drawingml/2006/main" xmlns:r="http://schemas.openxmlformats.org/officeDocument/2006/relationships" xmlns:p="http://schemas.openxmlformats.org/presentationml/2006/main">
   <p:cSld>
     <p:spTree>
@@ -5427,23 +5310,7 @@
           <a:p>
             <a:r>
               <a:rPr lang="fr-FR" dirty="0"/>
-              <a:t>Un DPU ne fait pas directement du </a:t>
-            </a:r>
-            <a:r>
-              <a:rPr lang="fr-FR" dirty="0" err="1"/>
-              <a:t>deep</a:t>
-            </a:r>
-            <a:r>
-              <a:rPr lang="fr-FR" dirty="0"/>
-              <a:t> </a:t>
-            </a:r>
-            <a:r>
-              <a:rPr lang="fr-FR" dirty="0" err="1"/>
-              <a:t>learning</a:t>
-            </a:r>
-            <a:r>
-              <a:rPr lang="fr-FR" dirty="0"/>
-              <a:t>, mais il est critique pour les performances globales</a:t>
+              <a:t>Un DPU ne fait pas directement du ML, mais il est critique pour les performances globales</a:t>
             </a:r>
           </a:p>
           <a:p>
@@ -5478,8 +5345,16 @@
             <a:pPr lvl="1"/>
             <a:r>
               <a:rPr lang="fr-FR" dirty="0"/>
-              <a:t>les GPU passent 100% de leur temps à calculer au lieu d’attendre les données.</a:t>
-            </a:r>
+              <a:t>les GPU passent 100% de leur temps à calculer au lieu d’attendre les données</a:t>
+            </a:r>
+          </a:p>
+          <a:p>
+            <a:pPr lvl="1"/>
+            <a:r>
+              <a:rPr lang="fr-FR"/>
+              <a:t>Très utilisé en FPGA</a:t>
+            </a:r>
+            <a:endParaRPr lang="fr-FR" dirty="0"/>
           </a:p>
         </p:txBody>
       </p:sp>

--- a/ppt/IoTAI30-NPU.pptx
+++ b/ppt/IoTAI30-NPU.pptx
@@ -4234,9 +4234,10 @@
           <a:lstStyle/>
           <a:p>
             <a:r>
-              <a:rPr lang="fr-FR" dirty="0"/>
-              <a:t>TP 30</a:t>
-            </a:r>
+              <a:rPr lang="fr-FR"/>
+              <a:t>TP 31</a:t>
+            </a:r>
+            <a:endParaRPr lang="fr-FR" dirty="0"/>
           </a:p>
         </p:txBody>
       </p:sp>
@@ -4263,7 +4264,11 @@
           <a:p>
             <a:r>
               <a:rPr lang="fr-FR"/>
-              <a:t>QEMU NPX</a:t>
+              <a:t>Démo : QEMU </a:t>
+            </a:r>
+            <a:r>
+              <a:rPr lang="fr-FR" dirty="0"/>
+              <a:t>NPX</a:t>
             </a:r>
           </a:p>
         </p:txBody>
